--- a/docs/바이브코딩_심화과정_강의자료.pptx
+++ b/docs/바이브코딩_심화과정_강의자료.pptx
@@ -5023,7 +5023,7 @@
                 <a:cs typeface="Calibri"/>
                 <a:sym typeface="Calibri"/>
               </a:rPr>
-              <a:t>AI와 함께 사내 도구 만들기</a:t>
+              <a:t>AI와 함께 OPIc 학습 앱 만들기</a:t>
             </a:r>
             <a:endParaRPr b="0" i="0" sz="2200" u="none" cap="none" strike="noStrike">
               <a:solidFill>
@@ -5129,7 +5129,7 @@
                 <a:cs typeface="Calibri"/>
                 <a:sym typeface="Calibri"/>
               </a:rPr>
-              <a:t>Claude Code CLI  ·  Google Antigravity  ·  MCP  ·  SQLite</a:t>
+              <a:t>Claude Code CLI  ·  Node.js Express  ·  Gemini AI  ·  SQLite</a:t>
             </a:r>
             <a:endParaRPr b="0" i="0" sz="1200" u="none" cap="none" strike="noStrike">
               <a:solidFill>
@@ -5458,7 +5458,7 @@
                 <a:cs typeface="Trebuchet MS"/>
                 <a:sym typeface="Trebuchet MS"/>
               </a:rPr>
-              <a:t>구글 안티그래비티 — Agent 모드 활용</a:t>
+              <a:t>Vanilla JS SPA + Gemini AI 연동</a:t>
             </a:r>
             <a:endParaRPr b="0" i="0" sz="2600" u="none" cap="none" strike="noStrike">
               <a:solidFill>
@@ -5521,7 +5521,7 @@
                 <a:cs typeface="Calibri"/>
                 <a:sym typeface="Calibri"/>
               </a:rPr>
-              <a:t>antigravity.google — AI Agent가 웹 앱을 만들어주는 도구</a:t>
+              <a:t>OPIc Master의 프론트-백-AI 통합 아키텍처</a:t>
             </a:r>
             <a:endParaRPr b="0" i="0" sz="1200" u="none" cap="none" strike="noStrike">
               <a:solidFill>
@@ -5677,7 +5677,7 @@
                 <a:cs typeface="Trebuchet MS"/>
                 <a:sym typeface="Trebuchet MS"/>
               </a:rPr>
-              <a:t>효과적인 프롬프트 전략</a:t>
+              <a:t>SPA 모듈 개발 패턴</a:t>
             </a:r>
             <a:endParaRPr b="0" i="0" sz="1600" u="none" cap="none" strike="noStrike">
               <a:solidFill>
@@ -5740,7 +5740,7 @@
                 <a:cs typeface="Calibri"/>
                 <a:sym typeface="Calibri"/>
               </a:rPr>
-              <a:t>완성된 화면을 구체적으로 묘사하기</a:t>
+              <a:t>createElement + textContent로 DOM 생성</a:t>
             </a:r>
             <a:endParaRPr b="0" i="0" sz="1200" u="none" cap="none" strike="noStrike">
               <a:solidFill>
@@ -5777,7 +5777,7 @@
                 <a:cs typeface="Calibri"/>
                 <a:sym typeface="Calibri"/>
               </a:rPr>
-              <a:t>  "메뉴 카드가 그리드로 배열되고, 각 카드에 투표 버튼"</a:t>
+              <a:t>  innerHTML 금지 (XSS 방지), 기존 모듈 패턴 따르기</a:t>
             </a:r>
             <a:endParaRPr b="0" i="0" sz="1200" u="none" cap="none" strike="noStrike">
               <a:solidFill>
@@ -5842,7 +5842,7 @@
                 <a:cs typeface="Calibri"/>
                 <a:sym typeface="Calibri"/>
               </a:rPr>
-              <a:t>기능 단위로 나눠서 요청하기</a:t>
+              <a:t>hash 기반 SPA 라우팅 이해</a:t>
             </a:r>
             <a:endParaRPr b="0" i="0" sz="1200" u="none" cap="none" strike="noStrike">
               <a:solidFill>
@@ -5879,7 +5879,7 @@
                 <a:cs typeface="Calibri"/>
                 <a:sym typeface="Calibri"/>
               </a:rPr>
-              <a:t>  한 번에 모든 기능 X → 화면별로 하나씩</a:t>
+              <a:t>  app.js 라우터에 모듈 등록, render(container) 메서드 구현</a:t>
             </a:r>
             <a:endParaRPr b="0" i="0" sz="1200" u="none" cap="none" strike="noStrike">
               <a:solidFill>
@@ -5944,7 +5944,7 @@
                 <a:cs typeface="Calibri"/>
                 <a:sym typeface="Calibri"/>
               </a:rPr>
-              <a:t>디자인 레퍼런스 제시하기</a:t>
+              <a:t>Gemini AI 연동 방법</a:t>
             </a:r>
             <a:endParaRPr b="0" i="0" sz="1200" u="none" cap="none" strike="noStrike">
               <a:solidFill>
@@ -5981,7 +5981,7 @@
                 <a:cs typeface="Calibri"/>
                 <a:sym typeface="Calibri"/>
               </a:rPr>
-              <a:t>  "깔끔한 카드 UI, 파란색 계열, 모바일 대응"</a:t>
+              <a:t>  services/gemini.js 패턴으로 AI 기능 추가</a:t>
             </a:r>
             <a:endParaRPr b="0" i="0" sz="1200" u="none" cap="none" strike="noStrike">
               <a:solidFill>
@@ -6137,7 +6137,7 @@
                 <a:cs typeface="Trebuchet MS"/>
                 <a:sym typeface="Trebuchet MS"/>
               </a:rPr>
-              <a:t>Agent 모드 핵심 기능</a:t>
+              <a:t>Gemini AI 활용 사례</a:t>
             </a:r>
             <a:endParaRPr b="0" i="0" sz="1600" u="none" cap="none" strike="noStrike">
               <a:solidFill>
@@ -6200,7 +6200,7 @@
                 <a:cs typeface="Calibri"/>
                 <a:sym typeface="Calibri"/>
               </a:rPr>
-              <a:t>자연어로 웹 앱 생성</a:t>
+              <a:t>답변 평가 (5축 점수)</a:t>
             </a:r>
             <a:endParaRPr b="0" i="0" sz="1200" u="none" cap="none" strike="noStrike">
               <a:solidFill>
@@ -6237,7 +6237,7 @@
                 <a:cs typeface="Calibri"/>
                 <a:sym typeface="Calibri"/>
               </a:rPr>
-              <a:t>실시간 미리보기 &amp; 수정</a:t>
+              <a:t>음성 녹음 분석 (멀티모달)</a:t>
             </a:r>
             <a:endParaRPr b="0" i="0" sz="1200" u="none" cap="none" strike="noStrike">
               <a:solidFill>
@@ -6274,7 +6274,7 @@
                 <a:cs typeface="Calibri"/>
                 <a:sym typeface="Calibri"/>
               </a:rPr>
-              <a:t>반복 대화로 기능 추가</a:t>
+              <a:t>스크립트 생성/개선</a:t>
             </a:r>
             <a:endParaRPr b="0" i="0" sz="1200" u="none" cap="none" strike="noStrike">
               <a:solidFill>
@@ -6311,7 +6311,7 @@
                 <a:cs typeface="Calibri"/>
                 <a:sym typeface="Calibri"/>
               </a:rPr>
-              <a:t>코드 내보내기(Export) 가능</a:t>
+              <a:t>퀴즈 힌트 생성 (실습 예정)</a:t>
             </a:r>
             <a:endParaRPr b="0" i="0" sz="1200" u="none" cap="none" strike="noStrike">
               <a:solidFill>
@@ -6348,7 +6348,7 @@
                 <a:cs typeface="Calibri"/>
                 <a:sym typeface="Calibri"/>
               </a:rPr>
-              <a:t>배포까지 원클릭</a:t>
+              <a:t>학습 계획 자동 생성</a:t>
             </a:r>
             <a:endParaRPr b="0" i="0" sz="1200" u="none" cap="none" strike="noStrike">
               <a:solidFill>
@@ -6677,7 +6677,7 @@
                 <a:cs typeface="Calibri"/>
                 <a:sym typeface="Calibri"/>
               </a:rPr>
-              <a:t>안티그래비티(프론트) + Claude Code(백엔드) + SQLite(DB) 연결 시연</a:t>
+              <a:t>Vanilla JS SPA(프론트) + Express(백엔드) + better-sqlite3(DB) + Gemini AI 연결 시연</a:t>
             </a:r>
             <a:endParaRPr b="0" i="0" sz="1200" u="none" cap="none" strike="noStrike">
               <a:solidFill>
@@ -6896,7 +6896,7 @@
                 <a:cs typeface="Trebuchet MS"/>
                 <a:sym typeface="Trebuchet MS"/>
               </a:rPr>
-              <a:t>안티그래비티</a:t>
+              <a:t>Vanilla JS SPA</a:t>
             </a:r>
             <a:endParaRPr b="0" i="0" sz="1400" u="none" cap="none" strike="noStrike">
               <a:solidFill>
@@ -6959,7 +6959,7 @@
                 <a:cs typeface="Calibri"/>
                 <a:sym typeface="Calibri"/>
               </a:rPr>
-              <a:t>웹 UI 자동 생성</a:t>
+              <a:t>Hash 라우팅 + 모듈</a:t>
             </a:r>
             <a:endParaRPr b="0" i="0" sz="1000" u="none" cap="none" strike="noStrike">
               <a:solidFill>
@@ -6996,7 +6996,7 @@
                 <a:cs typeface="Calibri"/>
                 <a:sym typeface="Calibri"/>
               </a:rPr>
-              <a:t>사용자 인터랙션</a:t>
+              <a:t>DOM 직접 조작</a:t>
             </a:r>
             <a:endParaRPr b="0" i="0" sz="1000" u="none" cap="none" strike="noStrike">
               <a:solidFill>
@@ -7033,7 +7033,7 @@
                 <a:cs typeface="Calibri"/>
                 <a:sym typeface="Calibri"/>
               </a:rPr>
-              <a:t>API 호출 (fetch)</a:t>
+              <a:t>apiGet/apiPost (fetch)</a:t>
             </a:r>
             <a:endParaRPr b="0" i="0" sz="1000" u="none" cap="none" strike="noStrike">
               <a:solidFill>
@@ -7123,7 +7123,7 @@
                 <a:cs typeface="Calibri"/>
                 <a:sym typeface="Calibri"/>
               </a:rPr>
-              <a:t>HTTP API</a:t>
+              <a:t>REST API</a:t>
             </a:r>
             <a:endParaRPr b="0" i="0" sz="800" u="none" cap="none" strike="noStrike">
               <a:solidFill>
@@ -7342,7 +7342,7 @@
                 <a:cs typeface="Trebuchet MS"/>
                 <a:sym typeface="Trebuchet MS"/>
               </a:rPr>
-              <a:t>Claude Code + FastAPI</a:t>
+              <a:t>Claude Code + Express</a:t>
             </a:r>
             <a:endParaRPr b="0" i="0" sz="1300" u="none" cap="none" strike="noStrike">
               <a:solidFill>
@@ -7405,7 +7405,7 @@
                 <a:cs typeface="Calibri"/>
                 <a:sym typeface="Calibri"/>
               </a:rPr>
-              <a:t>API 엔드포인트</a:t>
+              <a:t>REST API 엔드포인트</a:t>
             </a:r>
             <a:endParaRPr b="0" i="0" sz="1000" u="none" cap="none" strike="noStrike">
               <a:solidFill>
@@ -7442,7 +7442,7 @@
                 <a:cs typeface="Calibri"/>
                 <a:sym typeface="Calibri"/>
               </a:rPr>
-              <a:t>비즈니스 로직</a:t>
+              <a:t>비즈니스 로직 + Gemini AI</a:t>
             </a:r>
             <a:endParaRPr b="0" i="0" sz="1000" u="none" cap="none" strike="noStrike">
               <a:solidFill>
@@ -7479,7 +7479,7 @@
                 <a:cs typeface="Calibri"/>
                 <a:sym typeface="Calibri"/>
               </a:rPr>
-              <a:t>DB 연동 처리</a:t>
+              <a:t>SQLite 동기식 쿼리</a:t>
             </a:r>
             <a:endParaRPr b="0" i="0" sz="1000" u="none" cap="none" strike="noStrike">
               <a:solidFill>
@@ -7888,7 +7888,7 @@
                 <a:cs typeface="Calibri"/>
                 <a:sym typeface="Calibri"/>
               </a:rPr>
-              <a:t>설치 불필요</a:t>
+              <a:t>WAL 모드</a:t>
             </a:r>
             <a:endParaRPr b="0" i="0" sz="1000" u="none" cap="none" strike="noStrike">
               <a:solidFill>
@@ -7925,7 +7925,7 @@
                 <a:cs typeface="Calibri"/>
                 <a:sym typeface="Calibri"/>
               </a:rPr>
-              <a:t>파일 기반 DB</a:t>
+              <a:t>동기식 API</a:t>
             </a:r>
             <a:endParaRPr b="0" i="0" sz="1000" u="none" cap="none" strike="noStrike">
               <a:solidFill>
@@ -8060,7 +8060,7 @@
                 <a:cs typeface="Calibri"/>
                 <a:sym typeface="Calibri"/>
               </a:rPr>
-              <a:t>이 전체 구조를 3교시 실습에서 직접 만들어봅니다. 프론트-백-DB 풀스택!</a:t>
+              <a:t>이 전체 구조를 3교시 실습에서 직접 확장합니다. 프론트-백-DB-AI 풀스택!</a:t>
             </a:r>
             <a:endParaRPr b="0" i="0" sz="1200" u="none" cap="none" strike="noStrike">
               <a:solidFill>
@@ -8389,7 +8389,7 @@
                 <a:cs typeface="Calibri"/>
                 <a:sym typeface="Calibri"/>
               </a:rPr>
-              <a:t>바이브 코딩으로 이런 것들을 빠르게 만들 수 있습니다</a:t>
+              <a:t>바이브 코딩으로 이런 학습 도구를 빠르게 만들 수 있습니다</a:t>
             </a:r>
             <a:endParaRPr b="0" i="0" sz="1200" u="none" cap="none" strike="noStrike">
               <a:solidFill>
@@ -8545,7 +8545,7 @@
                 <a:cs typeface="Trebuchet MS"/>
                 <a:sym typeface="Trebuchet MS"/>
               </a:rPr>
-              <a:t>사내 점심 투표 앱</a:t>
+              <a:t>OPIc 모의시험 앱</a:t>
             </a:r>
             <a:endParaRPr b="0" i="0" sz="1400" u="none" cap="none" strike="noStrike">
               <a:solidFill>
@@ -8608,7 +8608,7 @@
                 <a:cs typeface="Calibri"/>
                 <a:sym typeface="Calibri"/>
               </a:rPr>
-              <a:t>오늘 실습에서 만들 앱!</a:t>
+              <a:t>오늘 실습 프로젝트!</a:t>
             </a:r>
             <a:endParaRPr b="0" i="0" sz="1000" u="none" cap="none" strike="noStrike">
               <a:solidFill>
@@ -8645,7 +8645,7 @@
                 <a:cs typeface="Calibri"/>
                 <a:sym typeface="Calibri"/>
               </a:rPr>
-              <a:t>DB + 웹 UI 통합</a:t>
+              <a:t>Express + SPA + AI 통합</a:t>
             </a:r>
             <a:endParaRPr b="0" i="0" sz="1000" u="none" cap="none" strike="noStrike">
               <a:solidFill>
@@ -8801,7 +8801,7 @@
                 <a:cs typeface="Trebuchet MS"/>
                 <a:sym typeface="Trebuchet MS"/>
               </a:rPr>
-              <a:t>업무 대시보드</a:t>
+              <a:t>학습 대시보드</a:t>
             </a:r>
             <a:endParaRPr b="0" i="0" sz="1400" u="none" cap="none" strike="noStrike">
               <a:solidFill>
@@ -8864,7 +8864,7 @@
                 <a:cs typeface="Calibri"/>
                 <a:sym typeface="Calibri"/>
               </a:rPr>
-              <a:t>팀 KPI, 프로젝트 현황</a:t>
+              <a:t>점수 추이, 5축 레이더 차트</a:t>
             </a:r>
             <a:endParaRPr b="0" i="0" sz="1000" u="none" cap="none" strike="noStrike">
               <a:solidFill>
@@ -8901,7 +8901,7 @@
                 <a:cs typeface="Calibri"/>
                 <a:sym typeface="Calibri"/>
               </a:rPr>
-              <a:t>실시간 모니터링</a:t>
+              <a:t>Chart.js 시각화</a:t>
             </a:r>
             <a:endParaRPr b="0" i="0" sz="1000" u="none" cap="none" strike="noStrike">
               <a:solidFill>
@@ -9057,7 +9057,7 @@
                 <a:cs typeface="Trebuchet MS"/>
                 <a:sym typeface="Trebuchet MS"/>
               </a:rPr>
-              <a:t>코드 리뷰 도우미</a:t>
+              <a:t>AI 피드백 시스템</a:t>
             </a:r>
             <a:endParaRPr b="0" i="0" sz="1400" u="none" cap="none" strike="noStrike">
               <a:solidFill>
@@ -9120,7 +9120,7 @@
                 <a:cs typeface="Calibri"/>
                 <a:sym typeface="Calibri"/>
               </a:rPr>
-              <a:t>PR 자동 분석, 코드 품질</a:t>
+              <a:t>답변 평가, 레벨 예측</a:t>
             </a:r>
             <a:endParaRPr b="0" i="0" sz="1000" u="none" cap="none" strike="noStrike">
               <a:solidFill>
@@ -9157,7 +9157,7 @@
                 <a:cs typeface="Calibri"/>
                 <a:sym typeface="Calibri"/>
               </a:rPr>
-              <a:t>체크 자동화</a:t>
+              <a:t>Gemini API 연동</a:t>
             </a:r>
             <a:endParaRPr b="0" i="0" sz="1000" u="none" cap="none" strike="noStrike">
               <a:solidFill>
@@ -9313,7 +9313,7 @@
                 <a:cs typeface="Trebuchet MS"/>
                 <a:sym typeface="Trebuchet MS"/>
               </a:rPr>
-              <a:t>회의록 자동 정리</a:t>
+              <a:t>간격반복(SRS) 학습</a:t>
             </a:r>
             <a:endParaRPr b="0" i="0" sz="1400" u="none" cap="none" strike="noStrike">
               <a:solidFill>
@@ -9376,7 +9376,7 @@
                 <a:cs typeface="Calibri"/>
                 <a:sym typeface="Calibri"/>
               </a:rPr>
-              <a:t>회의 내용 요약,</a:t>
+              <a:t>SM-2 알고리즘,</a:t>
             </a:r>
             <a:endParaRPr b="0" i="0" sz="1000" u="none" cap="none" strike="noStrike">
               <a:solidFill>
@@ -9413,7 +9413,7 @@
                 <a:cs typeface="Calibri"/>
                 <a:sym typeface="Calibri"/>
               </a:rPr>
-              <a:t>액션 아이템 추출</a:t>
+              <a:t>플래시카드 복습</a:t>
             </a:r>
             <a:endParaRPr b="0" i="0" sz="1000" u="none" cap="none" strike="noStrike">
               <a:solidFill>
@@ -9569,7 +9569,7 @@
                 <a:cs typeface="Trebuchet MS"/>
                 <a:sym typeface="Trebuchet MS"/>
               </a:rPr>
-              <a:t>API 테스트 도구</a:t>
+              <a:t>스크립트 빌더</a:t>
             </a:r>
             <a:endParaRPr b="0" i="0" sz="1400" u="none" cap="none" strike="noStrike">
               <a:solidFill>
@@ -9632,7 +9632,7 @@
                 <a:cs typeface="Calibri"/>
                 <a:sym typeface="Calibri"/>
               </a:rPr>
-              <a:t>내부 API 테스트 UI</a:t>
+              <a:t>AI 생성/개선</a:t>
             </a:r>
             <a:endParaRPr b="0" i="0" sz="1000" u="none" cap="none" strike="noStrike">
               <a:solidFill>
@@ -9669,7 +9669,7 @@
                 <a:cs typeface="Calibri"/>
                 <a:sym typeface="Calibri"/>
               </a:rPr>
-              <a:t>자동 문서화</a:t>
+              <a:t>자동 학습 계획</a:t>
             </a:r>
             <a:endParaRPr b="0" i="0" sz="1000" u="none" cap="none" strike="noStrike">
               <a:solidFill>
@@ -9825,7 +9825,7 @@
                 <a:cs typeface="Trebuchet MS"/>
                 <a:sym typeface="Trebuchet MS"/>
               </a:rPr>
-              <a:t>온보딩 가이드 봇</a:t>
+              <a:t>단어 퀴즈 기능</a:t>
             </a:r>
             <a:endParaRPr b="0" i="0" sz="1400" u="none" cap="none" strike="noStrike">
               <a:solidFill>
@@ -9888,7 +9888,7 @@
                 <a:cs typeface="Calibri"/>
                 <a:sym typeface="Calibri"/>
               </a:rPr>
-              <a:t>신규 입사자용</a:t>
+              <a:t>오늘 실습에서 추가!</a:t>
             </a:r>
             <a:endParaRPr b="0" i="0" sz="1000" u="none" cap="none" strike="noStrike">
               <a:solidFill>
@@ -9925,7 +9925,7 @@
                 <a:cs typeface="Calibri"/>
                 <a:sym typeface="Calibri"/>
               </a:rPr>
-              <a:t>사내 정보 안내 봇</a:t>
+              <a:t>topic_vocabulary 활용</a:t>
             </a:r>
             <a:endParaRPr b="0" i="0" sz="1000" u="none" cap="none" strike="noStrike">
               <a:solidFill>
@@ -10299,7 +10299,7 @@
                 <a:cs typeface="Calibri"/>
                 <a:sym typeface="Calibri"/>
               </a:rPr>
-              <a:t>사내 점심 메뉴 추천 &amp; 투표 앱 만들기</a:t>
+              <a:t>OPIc Master에 단어 퀴즈 기능 추가</a:t>
             </a:r>
             <a:endParaRPr b="0" i="0" sz="2000" u="none" cap="none" strike="noStrike">
               <a:solidFill>
@@ -10362,7 +10362,7 @@
                 <a:cs typeface="Calibri"/>
                 <a:sym typeface="Calibri"/>
               </a:rPr>
-              <a:t>각자의 속도로, 각자의 방식으로</a:t>
+              <a:t>기존 앱에 새 기능을 추가하는 실전 연습</a:t>
             </a:r>
             <a:endParaRPr b="0" i="0" sz="1400" u="none" cap="none" strike="noStrike">
               <a:solidFill>
@@ -10628,7 +10628,7 @@
                 <a:cs typeface="Trebuchet MS"/>
                 <a:sym typeface="Trebuchet MS"/>
               </a:rPr>
-              <a:t>실습 가이드: 점심 투표 앱</a:t>
+              <a:t>실습 가이드: OPIc 단어 퀴즈 기능</a:t>
             </a:r>
             <a:endParaRPr b="0" i="0" sz="2600" u="none" cap="none" strike="noStrike">
               <a:solidFill>
@@ -10691,7 +10691,7 @@
                 <a:cs typeface="Calibri"/>
                 <a:sym typeface="Calibri"/>
               </a:rPr>
-              <a:t>스텝별 가이드를 따라 진행하세요. 각 스텝의 프롬프트 예시를 활용하면 됩니다.</a:t>
+              <a:t>스텝별 가이드를 따라 진행하세요. 각 스텝의 프롬프트는 핸드아웃에 있습니다.</a:t>
             </a:r>
             <a:endParaRPr b="0" i="0" sz="1200" u="none" cap="none" strike="noStrike">
               <a:solidFill>
@@ -11018,7 +11018,7 @@
                 <a:cs typeface="Trebuchet MS"/>
                 <a:sym typeface="Trebuchet MS"/>
               </a:rPr>
-              <a:t>CLAUDE.md 작성</a:t>
+              <a:t>프로젝트 세팅 &amp; CLAUDE.md 확인</a:t>
             </a:r>
             <a:endParaRPr b="0" i="0" sz="1400" u="none" cap="none" strike="noStrike">
               <a:solidFill>
@@ -11081,7 +11081,7 @@
                 <a:cs typeface="Calibri"/>
                 <a:sym typeface="Calibri"/>
               </a:rPr>
-              <a:t>템플릿을 참고하여 프로젝트 목적, 기술 스택, 규칙 정의</a:t>
+              <a:t>git clone, npm install, .env 설정, 프로젝트 구조 파악</a:t>
             </a:r>
             <a:endParaRPr b="0" i="0" sz="1100" u="none" cap="none" strike="noStrike">
               <a:solidFill>
@@ -11408,7 +11408,7 @@
                 <a:cs typeface="Trebuchet MS"/>
                 <a:sym typeface="Trebuchet MS"/>
               </a:rPr>
-              <a:t>백엔드 생성 (Claude Code)</a:t>
+              <a:t>백엔드 — 퀴즈 API 생성</a:t>
             </a:r>
             <a:endParaRPr b="0" i="0" sz="1400" u="none" cap="none" strike="noStrike">
               <a:solidFill>
@@ -11471,7 +11471,7 @@
                 <a:cs typeface="Calibri"/>
                 <a:sym typeface="Calibri"/>
               </a:rPr>
-              <a:t>FastAPI + SQLite로 메뉴 CRUD + 투표 API 생성</a:t>
+              <a:t>Express 라우트 + quiz_results 테이블 추가</a:t>
             </a:r>
             <a:endParaRPr b="0" i="0" sz="1100" u="none" cap="none" strike="noStrike">
               <a:solidFill>
@@ -11798,7 +11798,7 @@
                 <a:cs typeface="Trebuchet MS"/>
                 <a:sym typeface="Trebuchet MS"/>
               </a:rPr>
-              <a:t>프론트엔드 생성 (안티그래비티)</a:t>
+              <a:t>프론트엔드 — 퀴즈 모듈 UI</a:t>
             </a:r>
             <a:endParaRPr b="0" i="0" sz="1400" u="none" cap="none" strike="noStrike">
               <a:solidFill>
@@ -11861,7 +11861,7 @@
                 <a:cs typeface="Calibri"/>
                 <a:sym typeface="Calibri"/>
               </a:rPr>
-              <a:t>메뉴 등록 / 투표 / 결과 보기 화면 생성</a:t>
+              <a:t>QuizModule SPA 모듈 + CSS + 라우터 등록</a:t>
             </a:r>
             <a:endParaRPr b="0" i="0" sz="1100" u="none" cap="none" strike="noStrike">
               <a:solidFill>
@@ -12251,7 +12251,7 @@
                 <a:cs typeface="Calibri"/>
                 <a:sym typeface="Calibri"/>
               </a:rPr>
-              <a:t>로컬에서 프론트-백 연결 후 동작 확인</a:t>
+              <a:t>서버 재시작, 브라우저에서 퀴즈 기능 확인</a:t>
             </a:r>
             <a:endParaRPr b="0" i="0" sz="1100" u="none" cap="none" strike="noStrike">
               <a:solidFill>
@@ -12359,7 +12359,7 @@
                 <a:cs typeface="Calibri"/>
                 <a:sym typeface="Calibri"/>
               </a:rPr>
-              <a:t>✓  막히면 가이드의 프롬프트 예시를 복사해서 사용하세요</a:t>
+              <a:t>✓  막히면 핸드아웃의 프롬프트를 복사해서 사용하세요</a:t>
             </a:r>
             <a:endParaRPr b="0" i="0" sz="1100" u="none" cap="none" strike="noStrike">
               <a:solidFill>
@@ -12396,7 +12396,7 @@
                 <a:cs typeface="Calibri"/>
                 <a:sym typeface="Calibri"/>
               </a:rPr>
-              <a:t>✓  빨리 끝나면 보너스 미션에 도전!  |  실습이 어려우면 데모 영상 참고 가능</a:t>
+              <a:t>✓  빨리 끝나면 보너스 미션에 도전!  |  막히면 강사에게 질문하세요</a:t>
             </a:r>
             <a:endParaRPr b="0" i="0" sz="1100" u="none" cap="none" strike="noStrike">
               <a:solidFill>
@@ -12881,7 +12881,7 @@
                 <a:cs typeface="Trebuchet MS"/>
                 <a:sym typeface="Trebuchet MS"/>
               </a:rPr>
-              <a:t>투표 마감 시간</a:t>
+              <a:t>퀴즈 결과 대시보드</a:t>
             </a:r>
             <a:endParaRPr b="0" i="0" sz="1500" u="none" cap="none" strike="noStrike">
               <a:solidFill>
@@ -12944,7 +12944,7 @@
                 <a:cs typeface="Calibri"/>
                 <a:sym typeface="Calibri"/>
               </a:rPr>
-              <a:t>특정 시간이 지나면 투표가 마감되는 기능 추가</a:t>
+              <a:t>Chart.js로 주제별 점수, 추이 그래프 시각화</a:t>
             </a:r>
             <a:endParaRPr b="0" i="0" sz="1200" u="none" cap="none" strike="noStrike">
               <a:solidFill>
@@ -13163,7 +13163,7 @@
                 <a:cs typeface="Trebuchet MS"/>
                 <a:sym typeface="Trebuchet MS"/>
               </a:rPr>
-              <a:t>메뉴별 사진 업로드</a:t>
+              <a:t>틀린 단어 SRS 자동 등록</a:t>
             </a:r>
             <a:endParaRPr b="0" i="0" sz="1500" u="none" cap="none" strike="noStrike">
               <a:solidFill>
@@ -13226,7 +13226,7 @@
                 <a:cs typeface="Calibri"/>
                 <a:sym typeface="Calibri"/>
               </a:rPr>
-              <a:t>이미지 업로드 &amp; 표시 기능 구현</a:t>
+              <a:t>오답 단어를 간격반복 복습 항목에 자동 추가</a:t>
             </a:r>
             <a:endParaRPr b="0" i="0" sz="1200" u="none" cap="none" strike="noStrike">
               <a:solidFill>
@@ -13445,7 +13445,7 @@
                 <a:cs typeface="Trebuchet MS"/>
                 <a:sym typeface="Trebuchet MS"/>
               </a:rPr>
-              <a:t>이번 주 인기 메뉴 통계</a:t>
+              <a:t>AI 퀴즈 힌트</a:t>
             </a:r>
             <a:endParaRPr b="0" i="0" sz="1500" u="none" cap="none" strike="noStrike">
               <a:solidFill>
@@ -13508,7 +13508,7 @@
                 <a:cs typeface="Calibri"/>
                 <a:sym typeface="Calibri"/>
               </a:rPr>
-              <a:t>차트로 이번 주 투표 결과 시각화</a:t>
+              <a:t>Gemini API로 어려운 단어 힌트/예문 생성</a:t>
             </a:r>
             <a:endParaRPr b="0" i="0" sz="1200" u="none" cap="none" strike="noStrike">
               <a:solidFill>
@@ -14397,7 +14397,7 @@
                 <a:cs typeface="Calibri"/>
                 <a:sym typeface="Calibri"/>
               </a:rPr>
-              <a:t>MCP + SQLite</a:t>
+              <a:t>Express + SQLite</a:t>
             </a:r>
             <a:endParaRPr b="0" i="0" sz="1200" u="none" cap="none" strike="noStrike">
               <a:solidFill>
@@ -14434,7 +14434,7 @@
                 <a:cs typeface="Calibri"/>
                 <a:sym typeface="Calibri"/>
               </a:rPr>
-              <a:t>DB 연결</a:t>
+              <a:t>API + DB</a:t>
             </a:r>
             <a:endParaRPr b="0" i="0" sz="1200" u="none" cap="none" strike="noStrike">
               <a:solidFill>
@@ -14542,7 +14542,7 @@
                 <a:cs typeface="Calibri"/>
                 <a:sym typeface="Calibri"/>
               </a:rPr>
-              <a:t>안티그래비티</a:t>
+              <a:t>SPA + Gemini AI</a:t>
             </a:r>
             <a:endParaRPr b="0" i="0" sz="1200" u="none" cap="none" strike="noStrike">
               <a:solidFill>
@@ -14579,7 +14579,7 @@
                 <a:cs typeface="Calibri"/>
                 <a:sym typeface="Calibri"/>
               </a:rPr>
-              <a:t>풀스택 PoC</a:t>
+              <a:t>풀스택 기능 추가</a:t>
             </a:r>
             <a:endParaRPr b="0" i="0" sz="1200" u="none" cap="none" strike="noStrike">
               <a:solidFill>
@@ -14642,7 +14642,7 @@
                 <a:cs typeface="Calibri"/>
                 <a:sym typeface="Calibri"/>
               </a:rPr>
-              <a:t>이제 바이브 코딩으로 사내 도구를 직접 만들어보세요!</a:t>
+              <a:t>이제 바이브 코딩으로 AI 학습 앱을 직접 확장해보세요!</a:t>
             </a:r>
             <a:endParaRPr b="0" i="0" sz="1500" u="none" cap="none" strike="noStrike">
               <a:solidFill>
@@ -16082,7 +16082,7 @@
                 <a:cs typeface="Calibri"/>
                 <a:sym typeface="Calibri"/>
               </a:rPr>
-              <a:t>DB 연결된 웹앱 PoC 만들기</a:t>
+              <a:t>AI 학습 앱 기능 추가하기</a:t>
             </a:r>
             <a:endParaRPr b="0" i="0" sz="1200" u="none" cap="none" strike="noStrike">
               <a:solidFill>
@@ -16217,7 +16217,7 @@
                 <a:cs typeface="Calibri"/>
                 <a:sym typeface="Calibri"/>
               </a:rPr>
-              <a:t>기본 과정에서 배운 내용을 바탕으로, 오늘은 실제 프로젝트를 만들 수 있는 수준으로 올라갑니다.</a:t>
+              <a:t>기본 과정에서 배운 내용을 바탕으로, 오늘은 실제 프로젝트에 기능을 추가하는 수준으로 올라갑니다.</a:t>
             </a:r>
             <a:endParaRPr b="0" i="0" sz="1300" u="none" cap="none" strike="noStrike">
               <a:solidFill>
@@ -17227,7 +17227,7 @@
                 <a:cs typeface="Calibri"/>
                 <a:sym typeface="Calibri"/>
               </a:rPr>
-              <a:t>안티그래비티 + 프론트-백 통합</a:t>
+              <a:t>Express API + Vanilla JS SPA + AI 통합</a:t>
             </a:r>
             <a:endParaRPr b="0" i="0" sz="1400" u="none" cap="none" strike="noStrike">
               <a:solidFill>
@@ -17290,7 +17290,7 @@
                 <a:cs typeface="Calibri"/>
                 <a:sym typeface="Calibri"/>
               </a:rPr>
-              <a:t>웹 UI 생성, API 연결, 활용 사례</a:t>
+              <a:t>REST API 설계, SPA 라우팅, Gemini AI 연동</a:t>
             </a:r>
             <a:endParaRPr b="0" i="0" sz="1000" u="none" cap="none" strike="noStrike">
               <a:solidFill>
@@ -17707,7 +17707,7 @@
                 <a:cs typeface="Calibri"/>
                 <a:sym typeface="Calibri"/>
               </a:rPr>
-              <a:t>개별 실습: 점심 투표 앱 만들기</a:t>
+              <a:t>개별 실습: OPIc 단어 퀴즈 기능 만들기</a:t>
             </a:r>
             <a:endParaRPr b="0" i="0" sz="1400" u="none" cap="none" strike="noStrike">
               <a:solidFill>
@@ -17770,7 +17770,7 @@
                 <a:cs typeface="Calibri"/>
                 <a:sym typeface="Calibri"/>
               </a:rPr>
-              <a:t>1~2교시 학습 내용 종합 실습</a:t>
+              <a:t>1~2교시 학습 내용 종합 실습 — 기존 앱에 기능 추가</a:t>
             </a:r>
             <a:endParaRPr b="0" i="0" sz="1000" u="none" cap="none" strike="noStrike">
               <a:solidFill>
@@ -18187,7 +18187,7 @@
                 <a:cs typeface="Calibri"/>
                 <a:sym typeface="Calibri"/>
               </a:rPr>
-              <a:t>CLAUDE.md  ·  프롬프트 패턴  ·  MCP  ·  SQLite</a:t>
+              <a:t>CLAUDE.md  ·  프롬프트 패턴  ·  MCP  ·  better-sqlite3</a:t>
             </a:r>
             <a:endParaRPr b="0" i="0" sz="1400" u="none" cap="none" strike="noStrike">
               <a:solidFill>
@@ -19191,7 +19191,7 @@
                 <a:cs typeface="Consolas"/>
                 <a:sym typeface="Consolas"/>
               </a:rPr>
-              <a:t>→ Python, FastAPI, SQLite 등</a:t>
+              <a:t>→ Node.js, Express, SQLite 등</a:t>
             </a:r>
             <a:endParaRPr b="0" i="0" sz="1100" u="none" cap="none" strike="noStrike">
               <a:solidFill>
@@ -19293,7 +19293,7 @@
                 <a:cs typeface="Consolas"/>
                 <a:sym typeface="Consolas"/>
               </a:rPr>
-              <a:t>→ 네이밍, 구조, 제약사항</a:t>
+              <a:t>→ XSS 방지, API 경로, 에러 형식</a:t>
             </a:r>
             <a:endParaRPr b="0" i="0" sz="1100" u="none" cap="none" strike="noStrike">
               <a:solidFill>
@@ -19395,7 +19395,7 @@
                 <a:cs typeface="Consolas"/>
                 <a:sym typeface="Consolas"/>
               </a:rPr>
-              <a:t>→ 디렉토리 구조 안내</a:t>
+              <a:t>→ 모듈-탭 매핑, 디렉토리 구조</a:t>
             </a:r>
             <a:endParaRPr b="0" i="0" sz="1100" u="none" cap="none" strike="noStrike">
               <a:solidFill>
@@ -20049,7 +20049,7 @@
                 <a:cs typeface="Consolas"/>
                 <a:sym typeface="Consolas"/>
               </a:rPr>
-              <a:t>"넌 FastAPI 백엔드 전문가야.</a:t>
+              <a:t>"넌 Express 백엔드 전문가야.</a:t>
             </a:r>
             <a:endParaRPr b="0" i="0" sz="900" u="none" cap="none" strike="noStrike">
               <a:solidFill>
@@ -20538,7 +20538,7 @@
                 <a:cs typeface="Consolas"/>
                 <a:sym typeface="Consolas"/>
               </a:rPr>
-              <a:t>"1단계: DB 스키마 설계</a:t>
+              <a:t>"1단계: quiz_results 테이블 설계</a:t>
             </a:r>
             <a:endParaRPr b="0" i="0" sz="900" u="none" cap="none" strike="noStrike">
               <a:solidFill>
@@ -20575,7 +20575,7 @@
                 <a:cs typeface="Consolas"/>
                 <a:sym typeface="Consolas"/>
               </a:rPr>
-              <a:t>2단계: API 엔드포인트 생성</a:t>
+              <a:t>2단계: Express 라우트 생성</a:t>
             </a:r>
             <a:endParaRPr b="0" i="0" sz="900" u="none" cap="none" strike="noStrike">
               <a:solidFill>
@@ -20612,7 +20612,7 @@
                 <a:cs typeface="Consolas"/>
                 <a:sym typeface="Consolas"/>
               </a:rPr>
-              <a:t>3단계: 에러 핸들링 추가"</a:t>
+              <a:t>3단계: SPA 모듈 + CSS 추가"</a:t>
             </a:r>
             <a:endParaRPr b="0" i="0" sz="900" u="none" cap="none" strike="noStrike">
               <a:solidFill>
@@ -21027,7 +21027,7 @@
                 <a:cs typeface="Consolas"/>
                 <a:sym typeface="Consolas"/>
               </a:rPr>
-              <a:t>"Python 3.11 이상 사용,</a:t>
+              <a:t>"Node.js 20 이상 사용,</a:t>
             </a:r>
             <a:endParaRPr b="0" i="0" sz="900" u="none" cap="none" strike="noStrike">
               <a:solidFill>
@@ -21064,7 +21064,7 @@
                 <a:cs typeface="Consolas"/>
                 <a:sym typeface="Consolas"/>
               </a:rPr>
-              <a:t>external 라이브러리 최소화,</a:t>
+              <a:t>innerHTML 사용 금지 (XSS 방지),</a:t>
             </a:r>
             <a:endParaRPr b="0" i="0" sz="900" u="none" cap="none" strike="noStrike">
               <a:solidFill>
@@ -21101,7 +21101,7 @@
                 <a:cs typeface="Consolas"/>
                 <a:sym typeface="Consolas"/>
               </a:rPr>
-              <a:t>한글 주석 필수"</a:t>
+              <a:t>API 경로 /api/v1/ 프리픽스"</a:t>
             </a:r>
             <a:endParaRPr b="0" i="0" sz="900" u="none" cap="none" strike="noStrike">
               <a:solidFill>
@@ -22522,7 +22522,7 @@
                 <a:cs typeface="Calibri"/>
                 <a:sym typeface="Calibri"/>
               </a:rPr>
-              <a:t>MCP를 쓰면 Claude Code가 직접 DB를 읽고 쓸 수 있습니다. 오늘은 SQLite MCP 서버를 사용합니다.</a:t>
+              <a:t>MCP를 쓰면 Claude Code가 직접 DB를 읽고 쓸 수 있습니다. 오늘은 SQLite MCP 서버로 OPIc Master DB를 탐색합니다.</a:t>
             </a:r>
             <a:endParaRPr b="0" i="0" sz="1200" u="none" cap="none" strike="noStrike">
               <a:solidFill>
@@ -22788,7 +22788,7 @@
                 <a:cs typeface="Trebuchet MS"/>
                 <a:sym typeface="Trebuchet MS"/>
               </a:rPr>
-              <a:t>라이브 데모: SQLite DB + CRUD 만들기</a:t>
+              <a:t>라이브 데모: 기존 DB 탐색 + 퀴즈 API 만들기</a:t>
             </a:r>
             <a:endParaRPr b="0" i="0" sz="2600" u="none" cap="none" strike="noStrike">
               <a:solidFill>
@@ -22851,7 +22851,7 @@
                 <a:cs typeface="Calibri"/>
                 <a:sym typeface="Calibri"/>
               </a:rPr>
-              <a:t>Claude Code로 DB 스키마 설계부터 CRUD API까지 한 번에 만드는 과정</a:t>
+              <a:t>Claude Code로 기존 DB 탐색부터 새 퀴즈 API까지 한 번에 만드는 과정</a:t>
             </a:r>
             <a:endParaRPr b="0" i="0" sz="1200" u="none" cap="none" strike="noStrike">
               <a:solidFill>
@@ -23176,7 +23176,7 @@
                 <a:cs typeface="Calibri"/>
                 <a:sym typeface="Calibri"/>
               </a:rPr>
-              <a:t>SQLite MCP 서버 연결 설정 확인</a:t>
+              <a:t>SQLite MCP로 기존 DB 탐색</a:t>
             </a:r>
             <a:endParaRPr b="0" i="0" sz="1200" u="none" cap="none" strike="noStrike">
               <a:solidFill>
@@ -23438,7 +23438,7 @@
                 <a:cs typeface="Trebuchet MS"/>
                 <a:sym typeface="Trebuchet MS"/>
               </a:rPr>
-              <a:t>DB 스키마 프롬프팅</a:t>
+              <a:t>quiz_results 테이블 추가</a:t>
             </a:r>
             <a:endParaRPr b="0" i="0" sz="1500" u="none" cap="none" strike="noStrike">
               <a:solidFill>
@@ -23501,7 +23501,7 @@
                 <a:cs typeface="Calibri"/>
                 <a:sym typeface="Calibri"/>
               </a:rPr>
-              <a:t>"사원 정보 테이블 만들어줘" → 자동 생성</a:t>
+              <a:t>"quiz_results 테이블 만들어줘" → 자동 생성</a:t>
             </a:r>
             <a:endParaRPr b="0" i="0" sz="1200" u="none" cap="none" strike="noStrike">
               <a:solidFill>
@@ -23763,7 +23763,7 @@
                 <a:cs typeface="Trebuchet MS"/>
                 <a:sym typeface="Trebuchet MS"/>
               </a:rPr>
-              <a:t>CRUD API 생성</a:t>
+              <a:t>퀴즈 API 생성</a:t>
             </a:r>
             <a:endParaRPr b="0" i="0" sz="1500" u="none" cap="none" strike="noStrike">
               <a:solidFill>
@@ -23826,7 +23826,7 @@
                 <a:cs typeface="Calibri"/>
                 <a:sym typeface="Calibri"/>
               </a:rPr>
-              <a:t>FastAPI로 조회/등록/수정/삭제 엔드포인트 생성</a:t>
+              <a:t>Express로 generate/submit/history 엔드포인트 생성</a:t>
             </a:r>
             <a:endParaRPr b="0" i="0" sz="1200" u="none" cap="none" strike="noStrike">
               <a:solidFill>
@@ -24088,7 +24088,7 @@
                 <a:cs typeface="Trebuchet MS"/>
                 <a:sym typeface="Trebuchet MS"/>
               </a:rPr>
-              <a:t>데이터 시딩</a:t>
+              <a:t>API 테스트</a:t>
             </a:r>
             <a:endParaRPr b="0" i="0" sz="1500" u="none" cap="none" strike="noStrike">
               <a:solidFill>
@@ -24151,7 +24151,7 @@
                 <a:cs typeface="Calibri"/>
                 <a:sym typeface="Calibri"/>
               </a:rPr>
-              <a:t>테스트 데이터 자동 생성까지 프롬프트 하나로</a:t>
+              <a:t>curl로 퀴즈 생성 &amp; 결과 저장 테스트</a:t>
             </a:r>
             <a:endParaRPr b="0" i="0" sz="1200" u="none" cap="none" strike="noStrike">
               <a:solidFill>
@@ -24214,7 +24214,7 @@
                 <a:cs typeface="Calibri"/>
                 <a:sym typeface="Calibri"/>
               </a:rPr>
-              <a:t>💡 3교시 실습에서 이 과정을 직접 해보게 됩니다</a:t>
+              <a:t>💡 3교시 실습에서 이 전체 과정을 직접 해보게 됩니다</a:t>
             </a:r>
             <a:endParaRPr b="0" i="0" sz="1100" u="none" cap="none" strike="noStrike">
               <a:solidFill>
@@ -24528,7 +24528,7 @@
                 <a:cs typeface="Trebuchet MS"/>
                 <a:sym typeface="Trebuchet MS"/>
               </a:rPr>
-              <a:t>구글 안티그래비티 심화</a:t>
+              <a:t>Express API + Vanilla JS SPA</a:t>
             </a:r>
             <a:endParaRPr b="0" i="0" sz="3600" u="none" cap="none" strike="noStrike">
               <a:solidFill>
@@ -24568,7 +24568,7 @@
                 <a:cs typeface="Trebuchet MS"/>
                 <a:sym typeface="Trebuchet MS"/>
               </a:rPr>
-              <a:t>+ 프론트-백 통합</a:t>
+              <a:t>+ AI 통합</a:t>
             </a:r>
             <a:endParaRPr b="0" i="0" sz="3600" u="none" cap="none" strike="noStrike">
               <a:solidFill>
@@ -24631,7 +24631,7 @@
                 <a:cs typeface="Calibri"/>
                 <a:sym typeface="Calibri"/>
               </a:rPr>
-              <a:t>웹 UI 생성  ·  API 연결  ·  사내 도구 활용 사례</a:t>
+              <a:t>REST API  ·  SPA 라우팅  ·  Gemini AI 연동</a:t>
             </a:r>
             <a:endParaRPr b="0" i="0" sz="1400" u="none" cap="none" strike="noStrike">
               <a:solidFill>
